--- a/knf/decks/d1p8.pptx
+++ b/knf/decks/d1p8.pptx
@@ -5634,7 +5634,7 @@
                 <a:ea typeface="Pretendard"/>
                 <a:cs typeface="Pretendard"/>
               </a:rPr>
-              <a:t>45분 뒤에는</a:t>
+              <a:t>50분 뒤에는</a:t>
             </a:r>
           </a:p>
         </p:txBody>

--- a/knf/decks/d1p8.pptx
+++ b/knf/decks/d1p8.pptx
@@ -3100,7 +3100,7 @@
       <p:grpSpPr/>
       <p:sp>
         <p:nvSpPr>
-          <p:cNvPr id="2" name="Oval 1"/>
+          <p:cNvPr id="2" name="deckgen:decor"/>
           <p:cNvSpPr/>
           <p:nvPr/>
         </p:nvSpPr>
@@ -3130,7 +3130,7 @@
       </p:sp>
       <p:sp>
         <p:nvSpPr>
-          <p:cNvPr id="3" name="Oval 2"/>
+          <p:cNvPr id="3" name="deckgen:decor"/>
           <p:cNvSpPr/>
           <p:nvPr/>
         </p:nvSpPr>
@@ -3160,7 +3160,7 @@
       </p:sp>
       <p:sp>
         <p:nvSpPr>
-          <p:cNvPr id="4" name="Oval 3"/>
+          <p:cNvPr id="4" name="deckgen:decor"/>
           <p:cNvSpPr/>
           <p:nvPr/>
         </p:nvSpPr>
@@ -3190,7 +3190,7 @@
       </p:sp>
       <p:sp>
         <p:nvSpPr>
-          <p:cNvPr id="5" name="Rectangle 4"/>
+          <p:cNvPr id="5" name="deckgen:decor"/>
           <p:cNvSpPr/>
           <p:nvPr/>
         </p:nvSpPr>
@@ -3220,7 +3220,7 @@
       </p:sp>
       <p:sp>
         <p:nvSpPr>
-          <p:cNvPr id="6" name="Oval 5"/>
+          <p:cNvPr id="6" name="deckgen:decor"/>
           <p:cNvSpPr/>
           <p:nvPr/>
         </p:nvSpPr>
@@ -3250,7 +3250,7 @@
       </p:sp>
       <p:sp>
         <p:nvSpPr>
-          <p:cNvPr id="7" name="Oval 6"/>
+          <p:cNvPr id="7" name="deckgen:decor"/>
           <p:cNvSpPr/>
           <p:nvPr/>
         </p:nvSpPr>
@@ -3280,7 +3280,7 @@
       </p:sp>
       <p:sp>
         <p:nvSpPr>
-          <p:cNvPr id="8" name="Oval 7"/>
+          <p:cNvPr id="8" name="deckgen:decor"/>
           <p:cNvSpPr/>
           <p:nvPr/>
         </p:nvSpPr>
@@ -3310,7 +3310,7 @@
       </p:sp>
       <p:sp>
         <p:nvSpPr>
-          <p:cNvPr id="9" name="Oval 8"/>
+          <p:cNvPr id="9" name="deckgen:decor"/>
           <p:cNvSpPr/>
           <p:nvPr/>
         </p:nvSpPr>
@@ -3340,7 +3340,7 @@
       </p:sp>
       <p:sp>
         <p:nvSpPr>
-          <p:cNvPr id="10" name="Rectangle 9"/>
+          <p:cNvPr id="10" name="deckgen:decor"/>
           <p:cNvSpPr/>
           <p:nvPr/>
         </p:nvSpPr>
@@ -3600,7 +3600,7 @@
       <p:grpSpPr/>
       <p:sp>
         <p:nvSpPr>
-          <p:cNvPr id="2" name="Oval 1"/>
+          <p:cNvPr id="2" name="deckgen:decor"/>
           <p:cNvSpPr/>
           <p:nvPr/>
         </p:nvSpPr>
@@ -3630,7 +3630,7 @@
       </p:sp>
       <p:sp>
         <p:nvSpPr>
-          <p:cNvPr id="3" name="Oval 2"/>
+          <p:cNvPr id="3" name="deckgen:decor"/>
           <p:cNvSpPr/>
           <p:nvPr/>
         </p:nvSpPr>
@@ -3660,7 +3660,7 @@
       </p:sp>
       <p:sp>
         <p:nvSpPr>
-          <p:cNvPr id="4" name="Oval 3"/>
+          <p:cNvPr id="4" name="deckgen:decor"/>
           <p:cNvSpPr/>
           <p:nvPr/>
         </p:nvSpPr>
@@ -4662,7 +4662,7 @@
       <p:grpSpPr/>
       <p:sp>
         <p:nvSpPr>
-          <p:cNvPr id="2" name="Oval 1"/>
+          <p:cNvPr id="2" name="deckgen:decor"/>
           <p:cNvSpPr/>
           <p:nvPr/>
         </p:nvSpPr>
@@ -4692,7 +4692,7 @@
       </p:sp>
       <p:sp>
         <p:nvSpPr>
-          <p:cNvPr id="3" name="Oval 2"/>
+          <p:cNvPr id="3" name="deckgen:decor"/>
           <p:cNvSpPr/>
           <p:nvPr/>
         </p:nvSpPr>
@@ -5469,7 +5469,7 @@
       <p:grpSpPr/>
       <p:sp>
         <p:nvSpPr>
-          <p:cNvPr id="2" name="Oval 1"/>
+          <p:cNvPr id="2" name="deckgen:decor"/>
           <p:cNvSpPr/>
           <p:nvPr/>
         </p:nvSpPr>
@@ -5499,7 +5499,7 @@
       </p:sp>
       <p:sp>
         <p:nvSpPr>
-          <p:cNvPr id="3" name="Oval 2"/>
+          <p:cNvPr id="3" name="deckgen:decor"/>
           <p:cNvSpPr/>
           <p:nvPr/>
         </p:nvSpPr>
@@ -5529,7 +5529,7 @@
       </p:sp>
       <p:sp>
         <p:nvSpPr>
-          <p:cNvPr id="4" name="Oval 3"/>
+          <p:cNvPr id="4" name="deckgen:decor"/>
           <p:cNvSpPr/>
           <p:nvPr/>
         </p:nvSpPr>
@@ -6314,7 +6314,7 @@
       <p:grpSpPr/>
       <p:sp>
         <p:nvSpPr>
-          <p:cNvPr id="2" name="Oval 1"/>
+          <p:cNvPr id="2" name="deckgen:decor"/>
           <p:cNvSpPr/>
           <p:nvPr/>
         </p:nvSpPr>
@@ -6344,7 +6344,7 @@
       </p:sp>
       <p:sp>
         <p:nvSpPr>
-          <p:cNvPr id="3" name="Oval 2"/>
+          <p:cNvPr id="3" name="deckgen:decor"/>
           <p:cNvSpPr/>
           <p:nvPr/>
         </p:nvSpPr>
@@ -6374,7 +6374,7 @@
       </p:sp>
       <p:sp>
         <p:nvSpPr>
-          <p:cNvPr id="4" name="Oval 3"/>
+          <p:cNvPr id="4" name="deckgen:decor"/>
           <p:cNvSpPr/>
           <p:nvPr/>
         </p:nvSpPr>
@@ -8659,7 +8659,7 @@
       <p:grpSpPr/>
       <p:sp>
         <p:nvSpPr>
-          <p:cNvPr id="2" name="Oval 1"/>
+          <p:cNvPr id="2" name="deckgen:decor"/>
           <p:cNvSpPr/>
           <p:nvPr/>
         </p:nvSpPr>
@@ -8689,7 +8689,7 @@
       </p:sp>
       <p:sp>
         <p:nvSpPr>
-          <p:cNvPr id="3" name="Oval 2"/>
+          <p:cNvPr id="3" name="deckgen:decor"/>
           <p:cNvSpPr/>
           <p:nvPr/>
         </p:nvSpPr>
@@ -8719,7 +8719,7 @@
       </p:sp>
       <p:sp>
         <p:nvSpPr>
-          <p:cNvPr id="4" name="Oval 3"/>
+          <p:cNvPr id="4" name="deckgen:decor"/>
           <p:cNvSpPr/>
           <p:nvPr/>
         </p:nvSpPr>
@@ -8925,7 +8925,7 @@
       </p:sp>
       <p:sp>
         <p:nvSpPr>
-          <p:cNvPr id="10" name="TextBox 9"/>
+          <p:cNvPr id="10" name="deckgen:ornament"/>
           <p:cNvSpPr txBox="1"/>
           <p:nvPr/>
         </p:nvSpPr>
@@ -9110,7 +9110,7 @@
       </p:sp>
       <p:sp>
         <p:nvSpPr>
-          <p:cNvPr id="14" name="TextBox 13"/>
+          <p:cNvPr id="14" name="deckgen:ornament"/>
           <p:cNvSpPr txBox="1"/>
           <p:nvPr/>
         </p:nvSpPr>
@@ -9295,7 +9295,7 @@
       </p:sp>
       <p:sp>
         <p:nvSpPr>
-          <p:cNvPr id="18" name="TextBox 17"/>
+          <p:cNvPr id="18" name="deckgen:ornament"/>
           <p:cNvSpPr txBox="1"/>
           <p:nvPr/>
         </p:nvSpPr>
@@ -9617,7 +9617,7 @@
       <p:grpSpPr/>
       <p:sp>
         <p:nvSpPr>
-          <p:cNvPr id="2" name="Oval 1"/>
+          <p:cNvPr id="2" name="deckgen:decor"/>
           <p:cNvSpPr/>
           <p:nvPr/>
         </p:nvSpPr>
@@ -9647,7 +9647,7 @@
       </p:sp>
       <p:sp>
         <p:nvSpPr>
-          <p:cNvPr id="3" name="Oval 2"/>
+          <p:cNvPr id="3" name="deckgen:decor"/>
           <p:cNvSpPr/>
           <p:nvPr/>
         </p:nvSpPr>
@@ -9677,7 +9677,7 @@
       </p:sp>
       <p:sp>
         <p:nvSpPr>
-          <p:cNvPr id="4" name="Oval 3"/>
+          <p:cNvPr id="4" name="deckgen:decor"/>
           <p:cNvSpPr/>
           <p:nvPr/>
         </p:nvSpPr>
@@ -10810,7 +10810,7 @@
       <p:grpSpPr/>
       <p:sp>
         <p:nvSpPr>
-          <p:cNvPr id="2" name="Oval 1"/>
+          <p:cNvPr id="2" name="deckgen:decor"/>
           <p:cNvSpPr/>
           <p:nvPr/>
         </p:nvSpPr>
@@ -10840,7 +10840,7 @@
       </p:sp>
       <p:sp>
         <p:nvSpPr>
-          <p:cNvPr id="3" name="Oval 2"/>
+          <p:cNvPr id="3" name="deckgen:decor"/>
           <p:cNvSpPr/>
           <p:nvPr/>
         </p:nvSpPr>
@@ -10870,7 +10870,7 @@
       </p:sp>
       <p:sp>
         <p:nvSpPr>
-          <p:cNvPr id="4" name="Oval 3"/>
+          <p:cNvPr id="4" name="deckgen:decor"/>
           <p:cNvSpPr/>
           <p:nvPr/>
         </p:nvSpPr>
@@ -11903,7 +11903,7 @@
       <p:grpSpPr/>
       <p:sp>
         <p:nvSpPr>
-          <p:cNvPr id="2" name="Oval 1"/>
+          <p:cNvPr id="2" name="deckgen:decor"/>
           <p:cNvSpPr/>
           <p:nvPr/>
         </p:nvSpPr>
@@ -11933,7 +11933,7 @@
       </p:sp>
       <p:sp>
         <p:nvSpPr>
-          <p:cNvPr id="3" name="Oval 2"/>
+          <p:cNvPr id="3" name="deckgen:decor"/>
           <p:cNvSpPr/>
           <p:nvPr/>
         </p:nvSpPr>
@@ -11963,7 +11963,7 @@
       </p:sp>
       <p:sp>
         <p:nvSpPr>
-          <p:cNvPr id="4" name="Oval 3"/>
+          <p:cNvPr id="4" name="deckgen:decor"/>
           <p:cNvSpPr/>
           <p:nvPr/>
         </p:nvSpPr>
@@ -13389,7 +13389,7 @@
       <p:grpSpPr/>
       <p:sp>
         <p:nvSpPr>
-          <p:cNvPr id="2" name="Oval 1"/>
+          <p:cNvPr id="2" name="deckgen:decor"/>
           <p:cNvSpPr/>
           <p:nvPr/>
         </p:nvSpPr>
@@ -13419,7 +13419,7 @@
       </p:sp>
       <p:sp>
         <p:nvSpPr>
-          <p:cNvPr id="3" name="Oval 2"/>
+          <p:cNvPr id="3" name="deckgen:decor"/>
           <p:cNvSpPr/>
           <p:nvPr/>
         </p:nvSpPr>
@@ -13449,7 +13449,7 @@
       </p:sp>
       <p:sp>
         <p:nvSpPr>
-          <p:cNvPr id="4" name="Oval 3"/>
+          <p:cNvPr id="4" name="deckgen:decor"/>
           <p:cNvSpPr/>
           <p:nvPr/>
         </p:nvSpPr>
@@ -14509,7 +14509,7 @@
       <p:grpSpPr/>
       <p:sp>
         <p:nvSpPr>
-          <p:cNvPr id="2" name="Oval 1"/>
+          <p:cNvPr id="2" name="deckgen:decor"/>
           <p:cNvSpPr/>
           <p:nvPr/>
         </p:nvSpPr>
@@ -14539,7 +14539,7 @@
       </p:sp>
       <p:sp>
         <p:nvSpPr>
-          <p:cNvPr id="3" name="Oval 2"/>
+          <p:cNvPr id="3" name="deckgen:decor"/>
           <p:cNvSpPr/>
           <p:nvPr/>
         </p:nvSpPr>
@@ -14569,7 +14569,7 @@
       </p:sp>
       <p:sp>
         <p:nvSpPr>
-          <p:cNvPr id="4" name="Oval 3"/>
+          <p:cNvPr id="4" name="deckgen:decor"/>
           <p:cNvSpPr/>
           <p:nvPr/>
         </p:nvSpPr>
